--- a/data/인공지능/01 - 인공지능개요.pptx
+++ b/data/인공지능/01 - 인공지능개요.pptx
@@ -379,7 +379,7 @@
       </p15:notesGuideLst>
     </p:ext>
     <p:ext uri="GoogleSlidesCustomDataVersion2">
-      <go:slidesCustomData xmlns="" xmlns:mc="http://schemas.openxmlformats.org/markup-compatibility/2006" xmlns:mv="urn:schemas-microsoft-com:mac:vml" xmlns:c="http://schemas.openxmlformats.org/drawingml/2006/chart" xmlns:dgm="http://schemas.openxmlformats.org/drawingml/2006/diagram" xmlns:o="urn:schemas-microsoft-com:office:office" xmlns:v="urn:schemas-microsoft-com:vml" xmlns:pvml="urn:schemas-microsoft-com:office:powerpoint" xmlns:com="http://schemas.openxmlformats.org/drawingml/2006/compatibility" xmlns:p14="http://schemas.microsoft.com/office/powerpoint/2010/main" xmlns:p15="http://schemas.microsoft.com/office/powerpoint/2012/main" xmlns:ahyp="http://schemas.microsoft.com/office/drawing/2018/hyperlinkcolor" xmlns:go="http://customooxmlschemas.google.com/" r:id="rId61" roundtripDataSignature="AMtx7mgQh/JTZB+tcnoesXfhZuEldfv5OQ=="/>
+      <go:slidesCustomData xmlns:go="http://customooxmlschemas.google.com/" xmlns:ahyp="http://schemas.microsoft.com/office/drawing/2018/hyperlinkcolor" xmlns:p15="http://schemas.microsoft.com/office/powerpoint/2012/main" xmlns:p14="http://schemas.microsoft.com/office/powerpoint/2010/main" xmlns:com="http://schemas.openxmlformats.org/drawingml/2006/compatibility" xmlns:pvml="urn:schemas-microsoft-com:office:powerpoint" xmlns:v="urn:schemas-microsoft-com:vml" xmlns:o="urn:schemas-microsoft-com:office:office" xmlns:dgm="http://schemas.openxmlformats.org/drawingml/2006/diagram" xmlns:c="http://schemas.openxmlformats.org/drawingml/2006/chart" xmlns:mv="urn:schemas-microsoft-com:mac:vml" xmlns:mc="http://schemas.openxmlformats.org/markup-compatibility/2006" xmlns="" r:id="rId61" roundtripDataSignature="AMtx7mgQh/JTZB+tcnoesXfhZuEldfv5OQ=="/>
     </p:ext>
   </p:extLst>
 </p:presentation>
@@ -14970,60 +14970,6 @@
           </a:p>
         </p:txBody>
       </p:sp>
-      <p:sp>
-        <p:nvSpPr>
-          <p:cNvPr id="329" name="Google Shape;329;p13"/>
-          <p:cNvSpPr txBox="1">
-            <a:spLocks noGrp="1"/>
-          </p:cNvSpPr>
-          <p:nvPr>
-            <p:ph type="ftr" idx="11"/>
-          </p:nvPr>
-        </p:nvSpPr>
-        <p:spPr>
-          <a:xfrm>
-            <a:off x="482154" y="6574971"/>
-            <a:ext cx="4114800" cy="216052"/>
-          </a:xfrm>
-          <a:prstGeom prst="rect">
-            <a:avLst/>
-          </a:prstGeom>
-          <a:noFill/>
-          <a:ln>
-            <a:noFill/>
-          </a:ln>
-        </p:spPr>
-        <p:txBody>
-          <a:bodyPr spcFirstLastPara="1" wrap="square" lIns="91425" tIns="45700" rIns="91425" bIns="45700" anchor="ctr" anchorCtr="0">
-            <a:noAutofit/>
-          </a:bodyPr>
-          <a:lstStyle/>
-          <a:p>
-            <a:pPr marL="0" marR="0" lvl="0" indent="0" algn="l" rtl="0">
-              <a:lnSpc>
-                <a:spcPct val="100000"/>
-              </a:lnSpc>
-              <a:spcBef>
-                <a:spcPts val="0"/>
-              </a:spcBef>
-              <a:spcAft>
-                <a:spcPts val="0"/>
-              </a:spcAft>
-              <a:buClr>
-                <a:schemeClr val="dk1"/>
-              </a:buClr>
-              <a:buSzPts val="1000"/>
-              <a:buFont typeface="Malgun Gothic"/>
-              <a:buNone/>
-            </a:pPr>
-            <a:r>
-              <a:rPr lang="ko-KR" b="1"/>
-              <a:t>〉 〉 혼자 공부하는 머신러닝+딥러닝</a:t>
-            </a:r>
-            <a:endParaRPr/>
-          </a:p>
-        </p:txBody>
-      </p:sp>
     </p:spTree>
   </p:cSld>
   <p:clrMapOvr>
@@ -15479,60 +15425,6 @@
               <a:cs typeface="Calibri"/>
               <a:sym typeface="Calibri"/>
             </a:endParaRPr>
-          </a:p>
-        </p:txBody>
-      </p:sp>
-      <p:sp>
-        <p:nvSpPr>
-          <p:cNvPr id="337" name="Google Shape;337;p14"/>
-          <p:cNvSpPr txBox="1">
-            <a:spLocks noGrp="1"/>
-          </p:cNvSpPr>
-          <p:nvPr>
-            <p:ph type="ftr" idx="11"/>
-          </p:nvPr>
-        </p:nvSpPr>
-        <p:spPr>
-          <a:xfrm>
-            <a:off x="482154" y="6574971"/>
-            <a:ext cx="4114800" cy="216052"/>
-          </a:xfrm>
-          <a:prstGeom prst="rect">
-            <a:avLst/>
-          </a:prstGeom>
-          <a:noFill/>
-          <a:ln>
-            <a:noFill/>
-          </a:ln>
-        </p:spPr>
-        <p:txBody>
-          <a:bodyPr spcFirstLastPara="1" wrap="square" lIns="91425" tIns="45700" rIns="91425" bIns="45700" anchor="ctr" anchorCtr="0">
-            <a:noAutofit/>
-          </a:bodyPr>
-          <a:lstStyle/>
-          <a:p>
-            <a:pPr marL="0" marR="0" lvl="0" indent="0" algn="l" rtl="0">
-              <a:lnSpc>
-                <a:spcPct val="100000"/>
-              </a:lnSpc>
-              <a:spcBef>
-                <a:spcPts val="0"/>
-              </a:spcBef>
-              <a:spcAft>
-                <a:spcPts val="0"/>
-              </a:spcAft>
-              <a:buClr>
-                <a:schemeClr val="dk1"/>
-              </a:buClr>
-              <a:buSzPts val="1000"/>
-              <a:buFont typeface="Malgun Gothic"/>
-              <a:buNone/>
-            </a:pPr>
-            <a:r>
-              <a:rPr lang="ko-KR" b="1"/>
-              <a:t>〉 〉 혼자 공부하는 머신러닝+딥러닝</a:t>
-            </a:r>
-            <a:endParaRPr/>
           </a:p>
         </p:txBody>
       </p:sp>
@@ -15965,60 +15857,6 @@
               <a:cs typeface="Calibri"/>
               <a:sym typeface="Calibri"/>
             </a:endParaRPr>
-          </a:p>
-        </p:txBody>
-      </p:sp>
-      <p:sp>
-        <p:nvSpPr>
-          <p:cNvPr id="345" name="Google Shape;345;p15"/>
-          <p:cNvSpPr txBox="1">
-            <a:spLocks noGrp="1"/>
-          </p:cNvSpPr>
-          <p:nvPr>
-            <p:ph type="ftr" idx="11"/>
-          </p:nvPr>
-        </p:nvSpPr>
-        <p:spPr>
-          <a:xfrm>
-            <a:off x="482154" y="6574971"/>
-            <a:ext cx="4114800" cy="216052"/>
-          </a:xfrm>
-          <a:prstGeom prst="rect">
-            <a:avLst/>
-          </a:prstGeom>
-          <a:noFill/>
-          <a:ln>
-            <a:noFill/>
-          </a:ln>
-        </p:spPr>
-        <p:txBody>
-          <a:bodyPr spcFirstLastPara="1" wrap="square" lIns="91425" tIns="45700" rIns="91425" bIns="45700" anchor="ctr" anchorCtr="0">
-            <a:noAutofit/>
-          </a:bodyPr>
-          <a:lstStyle/>
-          <a:p>
-            <a:pPr marL="0" marR="0" lvl="0" indent="0" algn="l" rtl="0">
-              <a:lnSpc>
-                <a:spcPct val="100000"/>
-              </a:lnSpc>
-              <a:spcBef>
-                <a:spcPts val="0"/>
-              </a:spcBef>
-              <a:spcAft>
-                <a:spcPts val="0"/>
-              </a:spcAft>
-              <a:buClr>
-                <a:schemeClr val="dk1"/>
-              </a:buClr>
-              <a:buSzPts val="1000"/>
-              <a:buFont typeface="Malgun Gothic"/>
-              <a:buNone/>
-            </a:pPr>
-            <a:r>
-              <a:rPr lang="ko-KR" b="1"/>
-              <a:t>〉 〉 혼자 공부하는 머신러닝+딥러닝</a:t>
-            </a:r>
-            <a:endParaRPr/>
           </a:p>
         </p:txBody>
       </p:sp>
@@ -18484,60 +18322,6 @@
           </a:p>
         </p:txBody>
       </p:sp>
-      <p:sp>
-        <p:nvSpPr>
-          <p:cNvPr id="355" name="Google Shape;355;p16"/>
-          <p:cNvSpPr txBox="1">
-            <a:spLocks noGrp="1"/>
-          </p:cNvSpPr>
-          <p:nvPr>
-            <p:ph type="ftr" idx="11"/>
-          </p:nvPr>
-        </p:nvSpPr>
-        <p:spPr>
-          <a:xfrm>
-            <a:off x="482154" y="6574971"/>
-            <a:ext cx="4114800" cy="216052"/>
-          </a:xfrm>
-          <a:prstGeom prst="rect">
-            <a:avLst/>
-          </a:prstGeom>
-          <a:noFill/>
-          <a:ln>
-            <a:noFill/>
-          </a:ln>
-        </p:spPr>
-        <p:txBody>
-          <a:bodyPr spcFirstLastPara="1" wrap="square" lIns="91425" tIns="45700" rIns="91425" bIns="45700" anchor="ctr" anchorCtr="0">
-            <a:noAutofit/>
-          </a:bodyPr>
-          <a:lstStyle/>
-          <a:p>
-            <a:pPr marL="0" marR="0" lvl="0" indent="0" algn="l" rtl="0">
-              <a:lnSpc>
-                <a:spcPct val="100000"/>
-              </a:lnSpc>
-              <a:spcBef>
-                <a:spcPts val="0"/>
-              </a:spcBef>
-              <a:spcAft>
-                <a:spcPts val="0"/>
-              </a:spcAft>
-              <a:buClr>
-                <a:schemeClr val="dk1"/>
-              </a:buClr>
-              <a:buSzPts val="1000"/>
-              <a:buFont typeface="Malgun Gothic"/>
-              <a:buNone/>
-            </a:pPr>
-            <a:r>
-              <a:rPr lang="ko-KR" b="1"/>
-              <a:t>〉 〉 혼자 공부하는 머신러닝+딥러닝</a:t>
-            </a:r>
-            <a:endParaRPr/>
-          </a:p>
-        </p:txBody>
-      </p:sp>
       <p:pic>
         <p:nvPicPr>
           <p:cNvPr id="356" name="Google Shape;356;p16"/>
@@ -19671,60 +19455,6 @@
           </a:p>
         </p:txBody>
       </p:sp>
-      <p:sp>
-        <p:nvSpPr>
-          <p:cNvPr id="382" name="Google Shape;382;p17"/>
-          <p:cNvSpPr txBox="1">
-            <a:spLocks noGrp="1"/>
-          </p:cNvSpPr>
-          <p:nvPr>
-            <p:ph type="ftr" idx="11"/>
-          </p:nvPr>
-        </p:nvSpPr>
-        <p:spPr>
-          <a:xfrm>
-            <a:off x="482154" y="6574971"/>
-            <a:ext cx="4114800" cy="216052"/>
-          </a:xfrm>
-          <a:prstGeom prst="rect">
-            <a:avLst/>
-          </a:prstGeom>
-          <a:noFill/>
-          <a:ln>
-            <a:noFill/>
-          </a:ln>
-        </p:spPr>
-        <p:txBody>
-          <a:bodyPr spcFirstLastPara="1" wrap="square" lIns="91425" tIns="45700" rIns="91425" bIns="45700" anchor="ctr" anchorCtr="0">
-            <a:noAutofit/>
-          </a:bodyPr>
-          <a:lstStyle/>
-          <a:p>
-            <a:pPr marL="0" marR="0" lvl="0" indent="0" algn="l" rtl="0">
-              <a:lnSpc>
-                <a:spcPct val="100000"/>
-              </a:lnSpc>
-              <a:spcBef>
-                <a:spcPts val="0"/>
-              </a:spcBef>
-              <a:spcAft>
-                <a:spcPts val="0"/>
-              </a:spcAft>
-              <a:buClr>
-                <a:schemeClr val="dk1"/>
-              </a:buClr>
-              <a:buSzPts val="1000"/>
-              <a:buFont typeface="Malgun Gothic"/>
-              <a:buNone/>
-            </a:pPr>
-            <a:r>
-              <a:rPr lang="ko-KR" b="1"/>
-              <a:t>〉 〉 혼자 공부하는 머신러닝+딥러닝</a:t>
-            </a:r>
-            <a:endParaRPr/>
-          </a:p>
-        </p:txBody>
-      </p:sp>
       <p:graphicFrame>
         <p:nvGraphicFramePr>
           <p:cNvPr id="383" name="Google Shape;383;p17"/>
@@ -20421,60 +20151,6 @@
           </a:p>
         </p:txBody>
       </p:sp>
-      <p:sp>
-        <p:nvSpPr>
-          <p:cNvPr id="397" name="Google Shape;397;p18"/>
-          <p:cNvSpPr txBox="1">
-            <a:spLocks noGrp="1"/>
-          </p:cNvSpPr>
-          <p:nvPr>
-            <p:ph type="ftr" idx="11"/>
-          </p:nvPr>
-        </p:nvSpPr>
-        <p:spPr>
-          <a:xfrm>
-            <a:off x="482154" y="6574971"/>
-            <a:ext cx="4114800" cy="216052"/>
-          </a:xfrm>
-          <a:prstGeom prst="rect">
-            <a:avLst/>
-          </a:prstGeom>
-          <a:noFill/>
-          <a:ln>
-            <a:noFill/>
-          </a:ln>
-        </p:spPr>
-        <p:txBody>
-          <a:bodyPr spcFirstLastPara="1" wrap="square" lIns="91425" tIns="45700" rIns="91425" bIns="45700" anchor="ctr" anchorCtr="0">
-            <a:noAutofit/>
-          </a:bodyPr>
-          <a:lstStyle/>
-          <a:p>
-            <a:pPr marL="0" marR="0" lvl="0" indent="0" algn="l" rtl="0">
-              <a:lnSpc>
-                <a:spcPct val="100000"/>
-              </a:lnSpc>
-              <a:spcBef>
-                <a:spcPts val="0"/>
-              </a:spcBef>
-              <a:spcAft>
-                <a:spcPts val="0"/>
-              </a:spcAft>
-              <a:buClr>
-                <a:schemeClr val="dk1"/>
-              </a:buClr>
-              <a:buSzPts val="1000"/>
-              <a:buFont typeface="Malgun Gothic"/>
-              <a:buNone/>
-            </a:pPr>
-            <a:r>
-              <a:rPr lang="ko-KR" b="1"/>
-              <a:t>〉 〉 혼자 공부하는 머신러닝+딥러닝</a:t>
-            </a:r>
-            <a:endParaRPr/>
-          </a:p>
-        </p:txBody>
-      </p:sp>
       <p:pic>
         <p:nvPicPr>
           <p:cNvPr id="398" name="Google Shape;398;p18"/>
@@ -20884,60 +20560,6 @@
       </p:sp>
       <p:sp>
         <p:nvSpPr>
-          <p:cNvPr id="406" name="Google Shape;406;p19"/>
-          <p:cNvSpPr txBox="1">
-            <a:spLocks noGrp="1"/>
-          </p:cNvSpPr>
-          <p:nvPr>
-            <p:ph type="ftr" idx="11"/>
-          </p:nvPr>
-        </p:nvSpPr>
-        <p:spPr>
-          <a:xfrm>
-            <a:off x="482154" y="6574971"/>
-            <a:ext cx="4114800" cy="216052"/>
-          </a:xfrm>
-          <a:prstGeom prst="rect">
-            <a:avLst/>
-          </a:prstGeom>
-          <a:noFill/>
-          <a:ln>
-            <a:noFill/>
-          </a:ln>
-        </p:spPr>
-        <p:txBody>
-          <a:bodyPr spcFirstLastPara="1" wrap="square" lIns="91425" tIns="45700" rIns="91425" bIns="45700" anchor="ctr" anchorCtr="0">
-            <a:noAutofit/>
-          </a:bodyPr>
-          <a:lstStyle/>
-          <a:p>
-            <a:pPr marL="0" marR="0" lvl="0" indent="0" algn="l" rtl="0">
-              <a:lnSpc>
-                <a:spcPct val="100000"/>
-              </a:lnSpc>
-              <a:spcBef>
-                <a:spcPts val="0"/>
-              </a:spcBef>
-              <a:spcAft>
-                <a:spcPts val="0"/>
-              </a:spcAft>
-              <a:buClr>
-                <a:schemeClr val="dk1"/>
-              </a:buClr>
-              <a:buSzPts val="1000"/>
-              <a:buFont typeface="Malgun Gothic"/>
-              <a:buNone/>
-            </a:pPr>
-            <a:r>
-              <a:rPr lang="ko-KR" b="1"/>
-              <a:t>〉 〉 혼자 공부하는 머신러닝+딥러닝</a:t>
-            </a:r>
-            <a:endParaRPr/>
-          </a:p>
-        </p:txBody>
-      </p:sp>
-      <p:sp>
-        <p:nvSpPr>
           <p:cNvPr id="407" name="Google Shape;407;p19"/>
           <p:cNvSpPr/>
           <p:nvPr/>
@@ -21544,60 +21166,6 @@
           </a:p>
         </p:txBody>
       </p:sp>
-      <p:sp>
-        <p:nvSpPr>
-          <p:cNvPr id="415" name="Google Shape;415;p20"/>
-          <p:cNvSpPr txBox="1">
-            <a:spLocks noGrp="1"/>
-          </p:cNvSpPr>
-          <p:nvPr>
-            <p:ph type="ftr" idx="11"/>
-          </p:nvPr>
-        </p:nvSpPr>
-        <p:spPr>
-          <a:xfrm>
-            <a:off x="482154" y="6574971"/>
-            <a:ext cx="4114800" cy="216052"/>
-          </a:xfrm>
-          <a:prstGeom prst="rect">
-            <a:avLst/>
-          </a:prstGeom>
-          <a:noFill/>
-          <a:ln>
-            <a:noFill/>
-          </a:ln>
-        </p:spPr>
-        <p:txBody>
-          <a:bodyPr spcFirstLastPara="1" wrap="square" lIns="91425" tIns="45700" rIns="91425" bIns="45700" anchor="ctr" anchorCtr="0">
-            <a:noAutofit/>
-          </a:bodyPr>
-          <a:lstStyle/>
-          <a:p>
-            <a:pPr marL="0" marR="0" lvl="0" indent="0" algn="l" rtl="0">
-              <a:lnSpc>
-                <a:spcPct val="100000"/>
-              </a:lnSpc>
-              <a:spcBef>
-                <a:spcPts val="0"/>
-              </a:spcBef>
-              <a:spcAft>
-                <a:spcPts val="0"/>
-              </a:spcAft>
-              <a:buClr>
-                <a:schemeClr val="dk1"/>
-              </a:buClr>
-              <a:buSzPts val="1000"/>
-              <a:buFont typeface="Malgun Gothic"/>
-              <a:buNone/>
-            </a:pPr>
-            <a:r>
-              <a:rPr lang="ko-KR" b="1"/>
-              <a:t>〉 〉 혼자 공부하는 머신러닝+딥러닝</a:t>
-            </a:r>
-            <a:endParaRPr/>
-          </a:p>
-        </p:txBody>
-      </p:sp>
     </p:spTree>
   </p:cSld>
   <p:clrMapOvr>
@@ -21886,60 +21454,6 @@
             <a:r>
               <a:rPr lang="ko-KR"/>
               <a:t>- 만약 [연결 앱] 목록에 [Google Colaboratory]가 없다면, [연결할 앱 더보기]를 클릭한 후 Colab을 검색해 설치해 주세요.</a:t>
-            </a:r>
-            <a:endParaRPr/>
-          </a:p>
-        </p:txBody>
-      </p:sp>
-      <p:sp>
-        <p:nvSpPr>
-          <p:cNvPr id="423" name="Google Shape;423;p21"/>
-          <p:cNvSpPr txBox="1">
-            <a:spLocks noGrp="1"/>
-          </p:cNvSpPr>
-          <p:nvPr>
-            <p:ph type="ftr" idx="11"/>
-          </p:nvPr>
-        </p:nvSpPr>
-        <p:spPr>
-          <a:xfrm>
-            <a:off x="482154" y="6574971"/>
-            <a:ext cx="4114800" cy="216052"/>
-          </a:xfrm>
-          <a:prstGeom prst="rect">
-            <a:avLst/>
-          </a:prstGeom>
-          <a:noFill/>
-          <a:ln>
-            <a:noFill/>
-          </a:ln>
-        </p:spPr>
-        <p:txBody>
-          <a:bodyPr spcFirstLastPara="1" wrap="square" lIns="91425" tIns="45700" rIns="91425" bIns="45700" anchor="ctr" anchorCtr="0">
-            <a:noAutofit/>
-          </a:bodyPr>
-          <a:lstStyle/>
-          <a:p>
-            <a:pPr marL="0" marR="0" lvl="0" indent="0" algn="l" rtl="0">
-              <a:lnSpc>
-                <a:spcPct val="100000"/>
-              </a:lnSpc>
-              <a:spcBef>
-                <a:spcPts val="0"/>
-              </a:spcBef>
-              <a:spcAft>
-                <a:spcPts val="0"/>
-              </a:spcAft>
-              <a:buClr>
-                <a:schemeClr val="dk1"/>
-              </a:buClr>
-              <a:buSzPts val="1000"/>
-              <a:buFont typeface="Malgun Gothic"/>
-              <a:buNone/>
-            </a:pPr>
-            <a:r>
-              <a:rPr lang="ko-KR" b="1"/>
-              <a:t>〉 〉 혼자 공부하는 머신러닝+딥러닝</a:t>
             </a:r>
             <a:endParaRPr/>
           </a:p>
@@ -22238,60 +21752,6 @@
             <a:r>
               <a:rPr lang="ko-KR"/>
               <a:t>표로 정리하는 툴바와 마크다운</a:t>
-            </a:r>
-            <a:endParaRPr/>
-          </a:p>
-        </p:txBody>
-      </p:sp>
-      <p:sp>
-        <p:nvSpPr>
-          <p:cNvPr id="432" name="Google Shape;432;p22"/>
-          <p:cNvSpPr txBox="1">
-            <a:spLocks noGrp="1"/>
-          </p:cNvSpPr>
-          <p:nvPr>
-            <p:ph type="ftr" idx="11"/>
-          </p:nvPr>
-        </p:nvSpPr>
-        <p:spPr>
-          <a:xfrm>
-            <a:off x="482154" y="6574971"/>
-            <a:ext cx="4114800" cy="216052"/>
-          </a:xfrm>
-          <a:prstGeom prst="rect">
-            <a:avLst/>
-          </a:prstGeom>
-          <a:noFill/>
-          <a:ln>
-            <a:noFill/>
-          </a:ln>
-        </p:spPr>
-        <p:txBody>
-          <a:bodyPr spcFirstLastPara="1" wrap="square" lIns="91425" tIns="45700" rIns="91425" bIns="45700" anchor="ctr" anchorCtr="0">
-            <a:noAutofit/>
-          </a:bodyPr>
-          <a:lstStyle/>
-          <a:p>
-            <a:pPr marL="0" marR="0" lvl="0" indent="0" algn="l" rtl="0">
-              <a:lnSpc>
-                <a:spcPct val="100000"/>
-              </a:lnSpc>
-              <a:spcBef>
-                <a:spcPts val="0"/>
-              </a:spcBef>
-              <a:spcAft>
-                <a:spcPts val="0"/>
-              </a:spcAft>
-              <a:buClr>
-                <a:schemeClr val="dk1"/>
-              </a:buClr>
-              <a:buSzPts val="1000"/>
-              <a:buFont typeface="Malgun Gothic"/>
-              <a:buNone/>
-            </a:pPr>
-            <a:r>
-              <a:rPr lang="ko-KR" b="1"/>
-              <a:t>〉 〉 혼자 공부하는 머신러닝+딥러닝</a:t>
             </a:r>
             <a:endParaRPr/>
           </a:p>
@@ -27631,60 +27091,6 @@
           </a:p>
         </p:txBody>
       </p:sp>
-      <p:sp>
-        <p:nvSpPr>
-          <p:cNvPr id="441" name="Google Shape;441;p23"/>
-          <p:cNvSpPr txBox="1">
-            <a:spLocks noGrp="1"/>
-          </p:cNvSpPr>
-          <p:nvPr>
-            <p:ph type="ftr" idx="11"/>
-          </p:nvPr>
-        </p:nvSpPr>
-        <p:spPr>
-          <a:xfrm>
-            <a:off x="482154" y="6574971"/>
-            <a:ext cx="4114800" cy="216052"/>
-          </a:xfrm>
-          <a:prstGeom prst="rect">
-            <a:avLst/>
-          </a:prstGeom>
-          <a:noFill/>
-          <a:ln>
-            <a:noFill/>
-          </a:ln>
-        </p:spPr>
-        <p:txBody>
-          <a:bodyPr spcFirstLastPara="1" wrap="square" lIns="91425" tIns="45700" rIns="91425" bIns="45700" anchor="ctr" anchorCtr="0">
-            <a:noAutofit/>
-          </a:bodyPr>
-          <a:lstStyle/>
-          <a:p>
-            <a:pPr marL="0" marR="0" lvl="0" indent="0" algn="l" rtl="0">
-              <a:lnSpc>
-                <a:spcPct val="100000"/>
-              </a:lnSpc>
-              <a:spcBef>
-                <a:spcPts val="0"/>
-              </a:spcBef>
-              <a:spcAft>
-                <a:spcPts val="0"/>
-              </a:spcAft>
-              <a:buClr>
-                <a:schemeClr val="dk1"/>
-              </a:buClr>
-              <a:buSzPts val="1000"/>
-              <a:buFont typeface="Malgun Gothic"/>
-              <a:buNone/>
-            </a:pPr>
-            <a:r>
-              <a:rPr lang="ko-KR" b="1"/>
-              <a:t>〉 〉 혼자 공부하는 머신러닝+딥러닝</a:t>
-            </a:r>
-            <a:endParaRPr/>
-          </a:p>
-        </p:txBody>
-      </p:sp>
       <p:graphicFrame>
         <p:nvGraphicFramePr>
           <p:cNvPr id="442" name="Google Shape;442;p23"/>
@@ -30233,60 +29639,6 @@
           </a:p>
         </p:txBody>
       </p:sp>
-      <p:sp>
-        <p:nvSpPr>
-          <p:cNvPr id="453" name="Google Shape;453;p24"/>
-          <p:cNvSpPr txBox="1">
-            <a:spLocks noGrp="1"/>
-          </p:cNvSpPr>
-          <p:nvPr>
-            <p:ph type="ftr" idx="11"/>
-          </p:nvPr>
-        </p:nvSpPr>
-        <p:spPr>
-          <a:xfrm>
-            <a:off x="482154" y="6574971"/>
-            <a:ext cx="4114800" cy="216052"/>
-          </a:xfrm>
-          <a:prstGeom prst="rect">
-            <a:avLst/>
-          </a:prstGeom>
-          <a:noFill/>
-          <a:ln>
-            <a:noFill/>
-          </a:ln>
-        </p:spPr>
-        <p:txBody>
-          <a:bodyPr spcFirstLastPara="1" wrap="square" lIns="91425" tIns="45700" rIns="91425" bIns="45700" anchor="ctr" anchorCtr="0">
-            <a:noAutofit/>
-          </a:bodyPr>
-          <a:lstStyle/>
-          <a:p>
-            <a:pPr marL="0" marR="0" lvl="0" indent="0" algn="l" rtl="0">
-              <a:lnSpc>
-                <a:spcPct val="100000"/>
-              </a:lnSpc>
-              <a:spcBef>
-                <a:spcPts val="0"/>
-              </a:spcBef>
-              <a:spcAft>
-                <a:spcPts val="0"/>
-              </a:spcAft>
-              <a:buClr>
-                <a:schemeClr val="dk1"/>
-              </a:buClr>
-              <a:buSzPts val="1000"/>
-              <a:buFont typeface="Malgun Gothic"/>
-              <a:buNone/>
-            </a:pPr>
-            <a:r>
-              <a:rPr lang="ko-KR" b="1"/>
-              <a:t>〉 〉 혼자 공부하는 머신러닝+딥러닝</a:t>
-            </a:r>
-            <a:endParaRPr/>
-          </a:p>
-        </p:txBody>
-      </p:sp>
     </p:spTree>
   </p:cSld>
   <p:clrMapOvr>
@@ -30676,60 +30028,6 @@
               <a:buSzPts val="2000"/>
               <a:buNone/>
             </a:pPr>
-            <a:endParaRPr/>
-          </a:p>
-        </p:txBody>
-      </p:sp>
-      <p:sp>
-        <p:nvSpPr>
-          <p:cNvPr id="461" name="Google Shape;461;p25"/>
-          <p:cNvSpPr txBox="1">
-            <a:spLocks noGrp="1"/>
-          </p:cNvSpPr>
-          <p:nvPr>
-            <p:ph type="ftr" idx="11"/>
-          </p:nvPr>
-        </p:nvSpPr>
-        <p:spPr>
-          <a:xfrm>
-            <a:off x="482154" y="6574971"/>
-            <a:ext cx="4114800" cy="216052"/>
-          </a:xfrm>
-          <a:prstGeom prst="rect">
-            <a:avLst/>
-          </a:prstGeom>
-          <a:noFill/>
-          <a:ln>
-            <a:noFill/>
-          </a:ln>
-        </p:spPr>
-        <p:txBody>
-          <a:bodyPr spcFirstLastPara="1" wrap="square" lIns="91425" tIns="45700" rIns="91425" bIns="45700" anchor="ctr" anchorCtr="0">
-            <a:noAutofit/>
-          </a:bodyPr>
-          <a:lstStyle/>
-          <a:p>
-            <a:pPr marL="0" marR="0" lvl="0" indent="0" algn="l" rtl="0">
-              <a:lnSpc>
-                <a:spcPct val="100000"/>
-              </a:lnSpc>
-              <a:spcBef>
-                <a:spcPts val="0"/>
-              </a:spcBef>
-              <a:spcAft>
-                <a:spcPts val="0"/>
-              </a:spcAft>
-              <a:buClr>
-                <a:schemeClr val="dk1"/>
-              </a:buClr>
-              <a:buSzPts val="1000"/>
-              <a:buFont typeface="Malgun Gothic"/>
-              <a:buNone/>
-            </a:pPr>
-            <a:r>
-              <a:rPr lang="ko-KR" b="1"/>
-              <a:t>〉 〉 혼자 공부하는 머신러닝+딥러닝</a:t>
-            </a:r>
             <a:endParaRPr/>
           </a:p>
         </p:txBody>
@@ -31101,60 +30399,6 @@
           </a:p>
         </p:txBody>
       </p:sp>
-      <p:sp>
-        <p:nvSpPr>
-          <p:cNvPr id="470" name="Google Shape;470;p26"/>
-          <p:cNvSpPr txBox="1">
-            <a:spLocks noGrp="1"/>
-          </p:cNvSpPr>
-          <p:nvPr>
-            <p:ph type="ftr" idx="11"/>
-          </p:nvPr>
-        </p:nvSpPr>
-        <p:spPr>
-          <a:xfrm>
-            <a:off x="482154" y="6574971"/>
-            <a:ext cx="4114800" cy="216052"/>
-          </a:xfrm>
-          <a:prstGeom prst="rect">
-            <a:avLst/>
-          </a:prstGeom>
-          <a:noFill/>
-          <a:ln>
-            <a:noFill/>
-          </a:ln>
-        </p:spPr>
-        <p:txBody>
-          <a:bodyPr spcFirstLastPara="1" wrap="square" lIns="91425" tIns="45700" rIns="91425" bIns="45700" anchor="ctr" anchorCtr="0">
-            <a:noAutofit/>
-          </a:bodyPr>
-          <a:lstStyle/>
-          <a:p>
-            <a:pPr marL="0" marR="0" lvl="0" indent="0" algn="l" rtl="0">
-              <a:lnSpc>
-                <a:spcPct val="100000"/>
-              </a:lnSpc>
-              <a:spcBef>
-                <a:spcPts val="0"/>
-              </a:spcBef>
-              <a:spcAft>
-                <a:spcPts val="0"/>
-              </a:spcAft>
-              <a:buClr>
-                <a:schemeClr val="dk1"/>
-              </a:buClr>
-              <a:buSzPts val="1000"/>
-              <a:buFont typeface="Malgun Gothic"/>
-              <a:buNone/>
-            </a:pPr>
-            <a:r>
-              <a:rPr lang="ko-KR" b="1"/>
-              <a:t>〉 〉 혼자 공부하는 머신러닝+딥러닝</a:t>
-            </a:r>
-            <a:endParaRPr/>
-          </a:p>
-        </p:txBody>
-      </p:sp>
       <p:pic>
         <p:nvPicPr>
           <p:cNvPr id="471" name="Google Shape;471;p26"/>
@@ -31605,60 +30849,6 @@
             <a:r>
               <a:rPr lang="ko-KR"/>
               <a:t>머신러닝은 기준을 찾을 뿐만 아니라 이 기준을 이용해 생선이 도미인지 아닌지 판별</a:t>
-            </a:r>
-            <a:endParaRPr/>
-          </a:p>
-        </p:txBody>
-      </p:sp>
-      <p:sp>
-        <p:nvSpPr>
-          <p:cNvPr id="479" name="Google Shape;479;p27"/>
-          <p:cNvSpPr txBox="1">
-            <a:spLocks noGrp="1"/>
-          </p:cNvSpPr>
-          <p:nvPr>
-            <p:ph type="ftr" idx="11"/>
-          </p:nvPr>
-        </p:nvSpPr>
-        <p:spPr>
-          <a:xfrm>
-            <a:off x="482154" y="6574971"/>
-            <a:ext cx="4114800" cy="216052"/>
-          </a:xfrm>
-          <a:prstGeom prst="rect">
-            <a:avLst/>
-          </a:prstGeom>
-          <a:noFill/>
-          <a:ln>
-            <a:noFill/>
-          </a:ln>
-        </p:spPr>
-        <p:txBody>
-          <a:bodyPr spcFirstLastPara="1" wrap="square" lIns="91425" tIns="45700" rIns="91425" bIns="45700" anchor="ctr" anchorCtr="0">
-            <a:noAutofit/>
-          </a:bodyPr>
-          <a:lstStyle/>
-          <a:p>
-            <a:pPr marL="0" marR="0" lvl="0" indent="0" algn="l" rtl="0">
-              <a:lnSpc>
-                <a:spcPct val="100000"/>
-              </a:lnSpc>
-              <a:spcBef>
-                <a:spcPts val="0"/>
-              </a:spcBef>
-              <a:spcAft>
-                <a:spcPts val="0"/>
-              </a:spcAft>
-              <a:buClr>
-                <a:schemeClr val="dk1"/>
-              </a:buClr>
-              <a:buSzPts val="1000"/>
-              <a:buFont typeface="Malgun Gothic"/>
-              <a:buNone/>
-            </a:pPr>
-            <a:r>
-              <a:rPr lang="ko-KR" b="1"/>
-              <a:t>〉 〉 혼자 공부하는 머신러닝+딥러닝</a:t>
             </a:r>
             <a:endParaRPr/>
           </a:p>
@@ -32149,60 +31339,6 @@
           </a:p>
         </p:txBody>
       </p:sp>
-      <p:sp>
-        <p:nvSpPr>
-          <p:cNvPr id="488" name="Google Shape;488;p28"/>
-          <p:cNvSpPr txBox="1">
-            <a:spLocks noGrp="1"/>
-          </p:cNvSpPr>
-          <p:nvPr>
-            <p:ph type="ftr" idx="11"/>
-          </p:nvPr>
-        </p:nvSpPr>
-        <p:spPr>
-          <a:xfrm>
-            <a:off x="482154" y="6574971"/>
-            <a:ext cx="4114800" cy="216052"/>
-          </a:xfrm>
-          <a:prstGeom prst="rect">
-            <a:avLst/>
-          </a:prstGeom>
-          <a:noFill/>
-          <a:ln>
-            <a:noFill/>
-          </a:ln>
-        </p:spPr>
-        <p:txBody>
-          <a:bodyPr spcFirstLastPara="1" wrap="square" lIns="91425" tIns="45700" rIns="91425" bIns="45700" anchor="ctr" anchorCtr="0">
-            <a:noAutofit/>
-          </a:bodyPr>
-          <a:lstStyle/>
-          <a:p>
-            <a:pPr marL="0" marR="0" lvl="0" indent="0" algn="l" rtl="0">
-              <a:lnSpc>
-                <a:spcPct val="100000"/>
-              </a:lnSpc>
-              <a:spcBef>
-                <a:spcPts val="0"/>
-              </a:spcBef>
-              <a:spcAft>
-                <a:spcPts val="0"/>
-              </a:spcAft>
-              <a:buClr>
-                <a:schemeClr val="dk1"/>
-              </a:buClr>
-              <a:buSzPts val="1000"/>
-              <a:buFont typeface="Malgun Gothic"/>
-              <a:buNone/>
-            </a:pPr>
-            <a:r>
-              <a:rPr lang="ko-KR" b="1"/>
-              <a:t>〉 〉 혼자 공부하는 머신러닝+딥러닝</a:t>
-            </a:r>
-            <a:endParaRPr/>
-          </a:p>
-        </p:txBody>
-      </p:sp>
     </p:spTree>
   </p:cSld>
   <p:clrMapOvr>
@@ -32597,60 +31733,6 @@
             <a:r>
               <a:rPr lang="ko-KR"/>
               <a:t>특성(feature): 각 도미를 길이와 무게로 표현</a:t>
-            </a:r>
-            <a:endParaRPr/>
-          </a:p>
-        </p:txBody>
-      </p:sp>
-      <p:sp>
-        <p:nvSpPr>
-          <p:cNvPr id="497" name="Google Shape;497;p29"/>
-          <p:cNvSpPr txBox="1">
-            <a:spLocks noGrp="1"/>
-          </p:cNvSpPr>
-          <p:nvPr>
-            <p:ph type="ftr" idx="11"/>
-          </p:nvPr>
-        </p:nvSpPr>
-        <p:spPr>
-          <a:xfrm>
-            <a:off x="482154" y="6574971"/>
-            <a:ext cx="4114800" cy="216052"/>
-          </a:xfrm>
-          <a:prstGeom prst="rect">
-            <a:avLst/>
-          </a:prstGeom>
-          <a:noFill/>
-          <a:ln>
-            <a:noFill/>
-          </a:ln>
-        </p:spPr>
-        <p:txBody>
-          <a:bodyPr spcFirstLastPara="1" wrap="square" lIns="91425" tIns="45700" rIns="91425" bIns="45700" anchor="ctr" anchorCtr="0">
-            <a:noAutofit/>
-          </a:bodyPr>
-          <a:lstStyle/>
-          <a:p>
-            <a:pPr marL="0" marR="0" lvl="0" indent="0" algn="l" rtl="0">
-              <a:lnSpc>
-                <a:spcPct val="100000"/>
-              </a:lnSpc>
-              <a:spcBef>
-                <a:spcPts val="0"/>
-              </a:spcBef>
-              <a:spcAft>
-                <a:spcPts val="0"/>
-              </a:spcAft>
-              <a:buClr>
-                <a:schemeClr val="dk1"/>
-              </a:buClr>
-              <a:buSzPts val="1000"/>
-              <a:buFont typeface="Malgun Gothic"/>
-              <a:buNone/>
-            </a:pPr>
-            <a:r>
-              <a:rPr lang="ko-KR" b="1"/>
-              <a:t>〉 〉 혼자 공부하는 머신러닝+딥러닝</a:t>
             </a:r>
             <a:endParaRPr/>
           </a:p>
@@ -33508,60 +32590,6 @@
           </a:p>
         </p:txBody>
       </p:sp>
-      <p:sp>
-        <p:nvSpPr>
-          <p:cNvPr id="510" name="Google Shape;510;p30"/>
-          <p:cNvSpPr txBox="1">
-            <a:spLocks noGrp="1"/>
-          </p:cNvSpPr>
-          <p:nvPr>
-            <p:ph type="ftr" idx="11"/>
-          </p:nvPr>
-        </p:nvSpPr>
-        <p:spPr>
-          <a:xfrm>
-            <a:off x="482154" y="6574971"/>
-            <a:ext cx="4114800" cy="216052"/>
-          </a:xfrm>
-          <a:prstGeom prst="rect">
-            <a:avLst/>
-          </a:prstGeom>
-          <a:noFill/>
-          <a:ln>
-            <a:noFill/>
-          </a:ln>
-        </p:spPr>
-        <p:txBody>
-          <a:bodyPr spcFirstLastPara="1" wrap="square" lIns="91425" tIns="45700" rIns="91425" bIns="45700" anchor="ctr" anchorCtr="0">
-            <a:noAutofit/>
-          </a:bodyPr>
-          <a:lstStyle/>
-          <a:p>
-            <a:pPr marL="0" marR="0" lvl="0" indent="0" algn="l" rtl="0">
-              <a:lnSpc>
-                <a:spcPct val="100000"/>
-              </a:lnSpc>
-              <a:spcBef>
-                <a:spcPts val="0"/>
-              </a:spcBef>
-              <a:spcAft>
-                <a:spcPts val="0"/>
-              </a:spcAft>
-              <a:buClr>
-                <a:schemeClr val="dk1"/>
-              </a:buClr>
-              <a:buSzPts val="1000"/>
-              <a:buFont typeface="Malgun Gothic"/>
-              <a:buNone/>
-            </a:pPr>
-            <a:r>
-              <a:rPr lang="ko-KR" b="1"/>
-              <a:t>〉 〉 혼자 공부하는 머신러닝+딥러닝</a:t>
-            </a:r>
-            <a:endParaRPr/>
-          </a:p>
-        </p:txBody>
-      </p:sp>
       <p:graphicFrame>
         <p:nvGraphicFramePr>
           <p:cNvPr id="511" name="Google Shape;511;p30"/>
@@ -34212,60 +33240,6 @@
               <a:buSzPts val="1800"/>
               <a:buNone/>
             </a:pPr>
-            <a:endParaRPr/>
-          </a:p>
-        </p:txBody>
-      </p:sp>
-      <p:sp>
-        <p:nvSpPr>
-          <p:cNvPr id="521" name="Google Shape;521;p31"/>
-          <p:cNvSpPr txBox="1">
-            <a:spLocks noGrp="1"/>
-          </p:cNvSpPr>
-          <p:nvPr>
-            <p:ph type="ftr" idx="11"/>
-          </p:nvPr>
-        </p:nvSpPr>
-        <p:spPr>
-          <a:xfrm>
-            <a:off x="482154" y="6574971"/>
-            <a:ext cx="4114800" cy="216052"/>
-          </a:xfrm>
-          <a:prstGeom prst="rect">
-            <a:avLst/>
-          </a:prstGeom>
-          <a:noFill/>
-          <a:ln>
-            <a:noFill/>
-          </a:ln>
-        </p:spPr>
-        <p:txBody>
-          <a:bodyPr spcFirstLastPara="1" wrap="square" lIns="91425" tIns="45700" rIns="91425" bIns="45700" anchor="ctr" anchorCtr="0">
-            <a:noAutofit/>
-          </a:bodyPr>
-          <a:lstStyle/>
-          <a:p>
-            <a:pPr marL="0" marR="0" lvl="0" indent="0" algn="l" rtl="0">
-              <a:lnSpc>
-                <a:spcPct val="100000"/>
-              </a:lnSpc>
-              <a:spcBef>
-                <a:spcPts val="0"/>
-              </a:spcBef>
-              <a:spcAft>
-                <a:spcPts val="0"/>
-              </a:spcAft>
-              <a:buClr>
-                <a:schemeClr val="dk1"/>
-              </a:buClr>
-              <a:buSzPts val="1000"/>
-              <a:buFont typeface="Malgun Gothic"/>
-              <a:buNone/>
-            </a:pPr>
-            <a:r>
-              <a:rPr lang="ko-KR" b="1"/>
-              <a:t>〉 〉 혼자 공부하는 머신러닝+딥러닝</a:t>
-            </a:r>
             <a:endParaRPr/>
           </a:p>
         </p:txBody>
@@ -34960,60 +33934,6 @@
           </a:p>
         </p:txBody>
       </p:sp>
-      <p:sp>
-        <p:nvSpPr>
-          <p:cNvPr id="533" name="Google Shape;533;p32"/>
-          <p:cNvSpPr txBox="1">
-            <a:spLocks noGrp="1"/>
-          </p:cNvSpPr>
-          <p:nvPr>
-            <p:ph type="ftr" idx="11"/>
-          </p:nvPr>
-        </p:nvSpPr>
-        <p:spPr>
-          <a:xfrm>
-            <a:off x="482154" y="6574971"/>
-            <a:ext cx="4114800" cy="216052"/>
-          </a:xfrm>
-          <a:prstGeom prst="rect">
-            <a:avLst/>
-          </a:prstGeom>
-          <a:noFill/>
-          <a:ln>
-            <a:noFill/>
-          </a:ln>
-        </p:spPr>
-        <p:txBody>
-          <a:bodyPr spcFirstLastPara="1" wrap="square" lIns="91425" tIns="45700" rIns="91425" bIns="45700" anchor="ctr" anchorCtr="0">
-            <a:noAutofit/>
-          </a:bodyPr>
-          <a:lstStyle/>
-          <a:p>
-            <a:pPr marL="0" marR="0" lvl="0" indent="0" algn="l" rtl="0">
-              <a:lnSpc>
-                <a:spcPct val="100000"/>
-              </a:lnSpc>
-              <a:spcBef>
-                <a:spcPts val="0"/>
-              </a:spcBef>
-              <a:spcAft>
-                <a:spcPts val="0"/>
-              </a:spcAft>
-              <a:buClr>
-                <a:schemeClr val="dk1"/>
-              </a:buClr>
-              <a:buSzPts val="1000"/>
-              <a:buFont typeface="Malgun Gothic"/>
-              <a:buNone/>
-            </a:pPr>
-            <a:r>
-              <a:rPr lang="ko-KR" b="1"/>
-              <a:t>〉 〉 혼자 공부하는 머신러닝+딥러닝</a:t>
-            </a:r>
-            <a:endParaRPr/>
-          </a:p>
-        </p:txBody>
-      </p:sp>
       <p:graphicFrame>
         <p:nvGraphicFramePr>
           <p:cNvPr id="534" name="Google Shape;534;p32"/>
@@ -35536,60 +34456,6 @@
           </a:p>
         </p:txBody>
       </p:sp>
-      <p:sp>
-        <p:nvSpPr>
-          <p:cNvPr id="220" name="Google Shape;220;p6"/>
-          <p:cNvSpPr txBox="1">
-            <a:spLocks noGrp="1"/>
-          </p:cNvSpPr>
-          <p:nvPr>
-            <p:ph type="ftr" idx="11"/>
-          </p:nvPr>
-        </p:nvSpPr>
-        <p:spPr>
-          <a:xfrm>
-            <a:off x="482154" y="6574971"/>
-            <a:ext cx="4114800" cy="216052"/>
-          </a:xfrm>
-          <a:prstGeom prst="rect">
-            <a:avLst/>
-          </a:prstGeom>
-          <a:noFill/>
-          <a:ln>
-            <a:noFill/>
-          </a:ln>
-        </p:spPr>
-        <p:txBody>
-          <a:bodyPr spcFirstLastPara="1" wrap="square" lIns="91425" tIns="45700" rIns="91425" bIns="45700" anchor="ctr" anchorCtr="0">
-            <a:noAutofit/>
-          </a:bodyPr>
-          <a:lstStyle/>
-          <a:p>
-            <a:pPr marL="0" marR="0" lvl="0" indent="0" algn="l" rtl="0">
-              <a:lnSpc>
-                <a:spcPct val="100000"/>
-              </a:lnSpc>
-              <a:spcBef>
-                <a:spcPts val="0"/>
-              </a:spcBef>
-              <a:spcAft>
-                <a:spcPts val="0"/>
-              </a:spcAft>
-              <a:buClr>
-                <a:schemeClr val="dk1"/>
-              </a:buClr>
-              <a:buSzPts val="1000"/>
-              <a:buFont typeface="Malgun Gothic"/>
-              <a:buNone/>
-            </a:pPr>
-            <a:r>
-              <a:rPr lang="ko-KR" b="1"/>
-              <a:t>〉 〉 혼자 공부하는 머신러닝+딥러닝</a:t>
-            </a:r>
-            <a:endParaRPr/>
-          </a:p>
-        </p:txBody>
-      </p:sp>
     </p:spTree>
   </p:cSld>
   <p:clrMapOvr>
@@ -36004,60 +34870,6 @@
             <a:r>
               <a:rPr lang="ko-KR"/>
               <a:t>예상대로 fish_data가 만들어졌는지 출력해서 확인</a:t>
-            </a:r>
-            <a:endParaRPr/>
-          </a:p>
-        </p:txBody>
-      </p:sp>
-      <p:sp>
-        <p:nvSpPr>
-          <p:cNvPr id="543" name="Google Shape;543;p33"/>
-          <p:cNvSpPr txBox="1">
-            <a:spLocks noGrp="1"/>
-          </p:cNvSpPr>
-          <p:nvPr>
-            <p:ph type="ftr" idx="11"/>
-          </p:nvPr>
-        </p:nvSpPr>
-        <p:spPr>
-          <a:xfrm>
-            <a:off x="482154" y="6574971"/>
-            <a:ext cx="4114800" cy="216052"/>
-          </a:xfrm>
-          <a:prstGeom prst="rect">
-            <a:avLst/>
-          </a:prstGeom>
-          <a:noFill/>
-          <a:ln>
-            <a:noFill/>
-          </a:ln>
-        </p:spPr>
-        <p:txBody>
-          <a:bodyPr spcFirstLastPara="1" wrap="square" lIns="91425" tIns="45700" rIns="91425" bIns="45700" anchor="ctr" anchorCtr="0">
-            <a:noAutofit/>
-          </a:bodyPr>
-          <a:lstStyle/>
-          <a:p>
-            <a:pPr marL="0" marR="0" lvl="0" indent="0" algn="l" rtl="0">
-              <a:lnSpc>
-                <a:spcPct val="100000"/>
-              </a:lnSpc>
-              <a:spcBef>
-                <a:spcPts val="0"/>
-              </a:spcBef>
-              <a:spcAft>
-                <a:spcPts val="0"/>
-              </a:spcAft>
-              <a:buClr>
-                <a:schemeClr val="dk1"/>
-              </a:buClr>
-              <a:buSzPts val="1000"/>
-              <a:buFont typeface="Malgun Gothic"/>
-              <a:buNone/>
-            </a:pPr>
-            <a:r>
-              <a:rPr lang="ko-KR" b="1"/>
-              <a:t>〉 〉 혼자 공부하는 머신러닝+딥러닝</a:t>
             </a:r>
             <a:endParaRPr/>
           </a:p>
@@ -36517,60 +35329,6 @@
             <a:r>
               <a:rPr lang="ko-KR"/>
               <a:t>곱셈 연산자를 사용하면 파이썬 리스트를 간단하게 반복시킬 수 있음</a:t>
-            </a:r>
-            <a:endParaRPr/>
-          </a:p>
-        </p:txBody>
-      </p:sp>
-      <p:sp>
-        <p:nvSpPr>
-          <p:cNvPr id="553" name="Google Shape;553;p34"/>
-          <p:cNvSpPr txBox="1">
-            <a:spLocks noGrp="1"/>
-          </p:cNvSpPr>
-          <p:nvPr>
-            <p:ph type="ftr" idx="11"/>
-          </p:nvPr>
-        </p:nvSpPr>
-        <p:spPr>
-          <a:xfrm>
-            <a:off x="482154" y="6574971"/>
-            <a:ext cx="4114800" cy="216052"/>
-          </a:xfrm>
-          <a:prstGeom prst="rect">
-            <a:avLst/>
-          </a:prstGeom>
-          <a:noFill/>
-          <a:ln>
-            <a:noFill/>
-          </a:ln>
-        </p:spPr>
-        <p:txBody>
-          <a:bodyPr spcFirstLastPara="1" wrap="square" lIns="91425" tIns="45700" rIns="91425" bIns="45700" anchor="ctr" anchorCtr="0">
-            <a:noAutofit/>
-          </a:bodyPr>
-          <a:lstStyle/>
-          <a:p>
-            <a:pPr marL="0" marR="0" lvl="0" indent="0" algn="l" rtl="0">
-              <a:lnSpc>
-                <a:spcPct val="100000"/>
-              </a:lnSpc>
-              <a:spcBef>
-                <a:spcPts val="0"/>
-              </a:spcBef>
-              <a:spcAft>
-                <a:spcPts val="0"/>
-              </a:spcAft>
-              <a:buClr>
-                <a:schemeClr val="dk1"/>
-              </a:buClr>
-              <a:buSzPts val="1000"/>
-              <a:buFont typeface="Malgun Gothic"/>
-              <a:buNone/>
-            </a:pPr>
-            <a:r>
-              <a:rPr lang="ko-KR" b="1"/>
-              <a:t>〉 〉 혼자 공부하는 머신러닝+딥러닝</a:t>
             </a:r>
             <a:endParaRPr/>
           </a:p>
@@ -37303,60 +36061,6 @@
               <a:buSzPts val="1400"/>
               <a:buNone/>
             </a:pPr>
-            <a:endParaRPr/>
-          </a:p>
-        </p:txBody>
-      </p:sp>
-      <p:sp>
-        <p:nvSpPr>
-          <p:cNvPr id="564" name="Google Shape;564;p35"/>
-          <p:cNvSpPr txBox="1">
-            <a:spLocks noGrp="1"/>
-          </p:cNvSpPr>
-          <p:nvPr>
-            <p:ph type="ftr" idx="11"/>
-          </p:nvPr>
-        </p:nvSpPr>
-        <p:spPr>
-          <a:xfrm>
-            <a:off x="482154" y="6574971"/>
-            <a:ext cx="4114800" cy="216052"/>
-          </a:xfrm>
-          <a:prstGeom prst="rect">
-            <a:avLst/>
-          </a:prstGeom>
-          <a:noFill/>
-          <a:ln>
-            <a:noFill/>
-          </a:ln>
-        </p:spPr>
-        <p:txBody>
-          <a:bodyPr spcFirstLastPara="1" wrap="square" lIns="91425" tIns="45700" rIns="91425" bIns="45700" anchor="ctr" anchorCtr="0">
-            <a:noAutofit/>
-          </a:bodyPr>
-          <a:lstStyle/>
-          <a:p>
-            <a:pPr marL="0" marR="0" lvl="0" indent="0" algn="l" rtl="0">
-              <a:lnSpc>
-                <a:spcPct val="100000"/>
-              </a:lnSpc>
-              <a:spcBef>
-                <a:spcPts val="0"/>
-              </a:spcBef>
-              <a:spcAft>
-                <a:spcPts val="0"/>
-              </a:spcAft>
-              <a:buClr>
-                <a:schemeClr val="dk1"/>
-              </a:buClr>
-              <a:buSzPts val="1000"/>
-              <a:buFont typeface="Malgun Gothic"/>
-              <a:buNone/>
-            </a:pPr>
-            <a:r>
-              <a:rPr lang="ko-KR" b="1"/>
-              <a:t>〉 〉 혼자 공부하는 머신러닝+딥러닝</a:t>
-            </a:r>
             <a:endParaRPr/>
           </a:p>
         </p:txBody>
@@ -38162,60 +36866,6 @@
             <a:r>
               <a:rPr lang="ko-KR"/>
               <a:t>다음 그림에 삼각형으로 표시된 새로운 데이터가 있다고 가정하면, 이 삼각형은 도미와 빙어 중 어디에 속할까?</a:t>
-            </a:r>
-            <a:endParaRPr/>
-          </a:p>
-        </p:txBody>
-      </p:sp>
-      <p:sp>
-        <p:nvSpPr>
-          <p:cNvPr id="578" name="Google Shape;578;p36"/>
-          <p:cNvSpPr txBox="1">
-            <a:spLocks noGrp="1"/>
-          </p:cNvSpPr>
-          <p:nvPr>
-            <p:ph type="ftr" idx="11"/>
-          </p:nvPr>
-        </p:nvSpPr>
-        <p:spPr>
-          <a:xfrm>
-            <a:off x="482154" y="6574971"/>
-            <a:ext cx="4114800" cy="216052"/>
-          </a:xfrm>
-          <a:prstGeom prst="rect">
-            <a:avLst/>
-          </a:prstGeom>
-          <a:noFill/>
-          <a:ln>
-            <a:noFill/>
-          </a:ln>
-        </p:spPr>
-        <p:txBody>
-          <a:bodyPr spcFirstLastPara="1" wrap="square" lIns="91425" tIns="45700" rIns="91425" bIns="45700" anchor="ctr" anchorCtr="0">
-            <a:noAutofit/>
-          </a:bodyPr>
-          <a:lstStyle/>
-          <a:p>
-            <a:pPr marL="0" marR="0" lvl="0" indent="0" algn="l" rtl="0">
-              <a:lnSpc>
-                <a:spcPct val="100000"/>
-              </a:lnSpc>
-              <a:spcBef>
-                <a:spcPts val="0"/>
-              </a:spcBef>
-              <a:spcAft>
-                <a:spcPts val="0"/>
-              </a:spcAft>
-              <a:buClr>
-                <a:schemeClr val="dk1"/>
-              </a:buClr>
-              <a:buSzPts val="1000"/>
-              <a:buFont typeface="Malgun Gothic"/>
-              <a:buNone/>
-            </a:pPr>
-            <a:r>
-              <a:rPr lang="ko-KR" b="1"/>
-              <a:t>〉 〉 혼자 공부하는 머신러닝+딥러닝</a:t>
             </a:r>
             <a:endParaRPr/>
           </a:p>
@@ -39125,60 +37775,6 @@
       </p:sp>
       <p:sp>
         <p:nvSpPr>
-          <p:cNvPr id="592" name="Google Shape;592;p37"/>
-          <p:cNvSpPr txBox="1">
-            <a:spLocks noGrp="1"/>
-          </p:cNvSpPr>
-          <p:nvPr>
-            <p:ph type="ftr" idx="11"/>
-          </p:nvPr>
-        </p:nvSpPr>
-        <p:spPr>
-          <a:xfrm>
-            <a:off x="482154" y="6574971"/>
-            <a:ext cx="4114800" cy="216052"/>
-          </a:xfrm>
-          <a:prstGeom prst="rect">
-            <a:avLst/>
-          </a:prstGeom>
-          <a:noFill/>
-          <a:ln>
-            <a:noFill/>
-          </a:ln>
-        </p:spPr>
-        <p:txBody>
-          <a:bodyPr spcFirstLastPara="1" wrap="square" lIns="91425" tIns="45700" rIns="91425" bIns="45700" anchor="ctr" anchorCtr="0">
-            <a:noAutofit/>
-          </a:bodyPr>
-          <a:lstStyle/>
-          <a:p>
-            <a:pPr marL="0" marR="0" lvl="0" indent="0" algn="l" rtl="0">
-              <a:lnSpc>
-                <a:spcPct val="100000"/>
-              </a:lnSpc>
-              <a:spcBef>
-                <a:spcPts val="0"/>
-              </a:spcBef>
-              <a:spcAft>
-                <a:spcPts val="0"/>
-              </a:spcAft>
-              <a:buClr>
-                <a:schemeClr val="dk1"/>
-              </a:buClr>
-              <a:buSzPts val="1000"/>
-              <a:buFont typeface="Malgun Gothic"/>
-              <a:buNone/>
-            </a:pPr>
-            <a:r>
-              <a:rPr lang="ko-KR" b="1"/>
-              <a:t>〉 〉 혼자 공부하는 머신러닝+딥러닝</a:t>
-            </a:r>
-            <a:endParaRPr/>
-          </a:p>
-        </p:txBody>
-      </p:sp>
-      <p:sp>
-        <p:nvSpPr>
           <p:cNvPr id="593" name="Google Shape;593;p37"/>
           <p:cNvSpPr/>
           <p:nvPr/>
@@ -39764,60 +38360,6 @@
             <a:r>
               <a:rPr lang="ko-KR"/>
               <a:t>- fish_data의 데이터 49개 중에 도미가 35개로 다수를 차지하므로 어떤 데이터를 넣어도 무조건 도미로 예측</a:t>
-            </a:r>
-            <a:endParaRPr/>
-          </a:p>
-        </p:txBody>
-      </p:sp>
-      <p:sp>
-        <p:nvSpPr>
-          <p:cNvPr id="604" name="Google Shape;604;p38"/>
-          <p:cNvSpPr txBox="1">
-            <a:spLocks noGrp="1"/>
-          </p:cNvSpPr>
-          <p:nvPr>
-            <p:ph type="ftr" idx="11"/>
-          </p:nvPr>
-        </p:nvSpPr>
-        <p:spPr>
-          <a:xfrm>
-            <a:off x="482154" y="6574971"/>
-            <a:ext cx="4114800" cy="216052"/>
-          </a:xfrm>
-          <a:prstGeom prst="rect">
-            <a:avLst/>
-          </a:prstGeom>
-          <a:noFill/>
-          <a:ln>
-            <a:noFill/>
-          </a:ln>
-        </p:spPr>
-        <p:txBody>
-          <a:bodyPr spcFirstLastPara="1" wrap="square" lIns="91425" tIns="45700" rIns="91425" bIns="45700" anchor="ctr" anchorCtr="0">
-            <a:noAutofit/>
-          </a:bodyPr>
-          <a:lstStyle/>
-          <a:p>
-            <a:pPr marL="0" marR="0" lvl="0" indent="0" algn="l" rtl="0">
-              <a:lnSpc>
-                <a:spcPct val="100000"/>
-              </a:lnSpc>
-              <a:spcBef>
-                <a:spcPts val="0"/>
-              </a:spcBef>
-              <a:spcAft>
-                <a:spcPts val="0"/>
-              </a:spcAft>
-              <a:buClr>
-                <a:schemeClr val="dk1"/>
-              </a:buClr>
-              <a:buSzPts val="1000"/>
-              <a:buFont typeface="Malgun Gothic"/>
-              <a:buNone/>
-            </a:pPr>
-            <a:r>
-              <a:rPr lang="ko-KR" b="1"/>
-              <a:t>〉 〉 혼자 공부하는 머신러닝+딥러닝</a:t>
             </a:r>
             <a:endParaRPr/>
           </a:p>
@@ -40487,60 +39029,6 @@
           </a:p>
         </p:txBody>
       </p:sp>
-      <p:sp>
-        <p:nvSpPr>
-          <p:cNvPr id="616" name="Google Shape;616;p39"/>
-          <p:cNvSpPr txBox="1">
-            <a:spLocks noGrp="1"/>
-          </p:cNvSpPr>
-          <p:nvPr>
-            <p:ph type="ftr" idx="11"/>
-          </p:nvPr>
-        </p:nvSpPr>
-        <p:spPr>
-          <a:xfrm>
-            <a:off x="482154" y="6574971"/>
-            <a:ext cx="4114800" cy="216052"/>
-          </a:xfrm>
-          <a:prstGeom prst="rect">
-            <a:avLst/>
-          </a:prstGeom>
-          <a:noFill/>
-          <a:ln>
-            <a:noFill/>
-          </a:ln>
-        </p:spPr>
-        <p:txBody>
-          <a:bodyPr spcFirstLastPara="1" wrap="square" lIns="91425" tIns="45700" rIns="91425" bIns="45700" anchor="ctr" anchorCtr="0">
-            <a:noAutofit/>
-          </a:bodyPr>
-          <a:lstStyle/>
-          <a:p>
-            <a:pPr marL="0" marR="0" lvl="0" indent="0" algn="l" rtl="0">
-              <a:lnSpc>
-                <a:spcPct val="100000"/>
-              </a:lnSpc>
-              <a:spcBef>
-                <a:spcPts val="0"/>
-              </a:spcBef>
-              <a:spcAft>
-                <a:spcPts val="0"/>
-              </a:spcAft>
-              <a:buClr>
-                <a:schemeClr val="dk1"/>
-              </a:buClr>
-              <a:buSzPts val="1000"/>
-              <a:buFont typeface="Malgun Gothic"/>
-              <a:buNone/>
-            </a:pPr>
-            <a:r>
-              <a:rPr lang="ko-KR" b="1"/>
-              <a:t>〉 〉 혼자 공부하는 머신러닝+딥러닝</a:t>
-            </a:r>
-            <a:endParaRPr/>
-          </a:p>
-        </p:txBody>
-      </p:sp>
       <p:graphicFrame>
         <p:nvGraphicFramePr>
           <p:cNvPr id="617" name="Google Shape;617;p39"/>
@@ -41401,60 +39889,6 @@
           </a:p>
         </p:txBody>
       </p:sp>
-      <p:sp>
-        <p:nvSpPr>
-          <p:cNvPr id="629" name="Google Shape;629;p40"/>
-          <p:cNvSpPr txBox="1">
-            <a:spLocks noGrp="1"/>
-          </p:cNvSpPr>
-          <p:nvPr>
-            <p:ph type="ftr" idx="11"/>
-          </p:nvPr>
-        </p:nvSpPr>
-        <p:spPr>
-          <a:xfrm>
-            <a:off x="482154" y="6574971"/>
-            <a:ext cx="4114800" cy="216052"/>
-          </a:xfrm>
-          <a:prstGeom prst="rect">
-            <a:avLst/>
-          </a:prstGeom>
-          <a:noFill/>
-          <a:ln>
-            <a:noFill/>
-          </a:ln>
-        </p:spPr>
-        <p:txBody>
-          <a:bodyPr spcFirstLastPara="1" wrap="square" lIns="91425" tIns="45700" rIns="91425" bIns="45700" anchor="ctr" anchorCtr="0">
-            <a:noAutofit/>
-          </a:bodyPr>
-          <a:lstStyle/>
-          <a:p>
-            <a:pPr marL="0" marR="0" lvl="0" indent="0" algn="l" rtl="0">
-              <a:lnSpc>
-                <a:spcPct val="100000"/>
-              </a:lnSpc>
-              <a:spcBef>
-                <a:spcPts val="0"/>
-              </a:spcBef>
-              <a:spcAft>
-                <a:spcPts val="0"/>
-              </a:spcAft>
-              <a:buClr>
-                <a:schemeClr val="dk1"/>
-              </a:buClr>
-              <a:buSzPts val="1000"/>
-              <a:buFont typeface="Malgun Gothic"/>
-              <a:buNone/>
-            </a:pPr>
-            <a:r>
-              <a:rPr lang="ko-KR" b="1"/>
-              <a:t>〉 〉 혼자 공부하는 머신러닝+딥러닝</a:t>
-            </a:r>
-            <a:endParaRPr/>
-          </a:p>
-        </p:txBody>
-      </p:sp>
     </p:spTree>
   </p:cSld>
   <p:clrMapOvr>
@@ -41855,60 +40289,6 @@
             <a:r>
               <a:rPr lang="ko-KR"/>
               <a:t>정확도 = (정확히 맞힌 개수) / (전체 데이터 개수)</a:t>
-            </a:r>
-            <a:endParaRPr/>
-          </a:p>
-        </p:txBody>
-      </p:sp>
-      <p:sp>
-        <p:nvSpPr>
-          <p:cNvPr id="637" name="Google Shape;637;p41"/>
-          <p:cNvSpPr txBox="1">
-            <a:spLocks noGrp="1"/>
-          </p:cNvSpPr>
-          <p:nvPr>
-            <p:ph type="ftr" idx="11"/>
-          </p:nvPr>
-        </p:nvSpPr>
-        <p:spPr>
-          <a:xfrm>
-            <a:off x="482154" y="6574971"/>
-            <a:ext cx="4114800" cy="216052"/>
-          </a:xfrm>
-          <a:prstGeom prst="rect">
-            <a:avLst/>
-          </a:prstGeom>
-          <a:noFill/>
-          <a:ln>
-            <a:noFill/>
-          </a:ln>
-        </p:spPr>
-        <p:txBody>
-          <a:bodyPr spcFirstLastPara="1" wrap="square" lIns="91425" tIns="45700" rIns="91425" bIns="45700" anchor="ctr" anchorCtr="0">
-            <a:noAutofit/>
-          </a:bodyPr>
-          <a:lstStyle/>
-          <a:p>
-            <a:pPr marL="0" marR="0" lvl="0" indent="0" algn="l" rtl="0">
-              <a:lnSpc>
-                <a:spcPct val="100000"/>
-              </a:lnSpc>
-              <a:spcBef>
-                <a:spcPts val="0"/>
-              </a:spcBef>
-              <a:spcAft>
-                <a:spcPts val="0"/>
-              </a:spcAft>
-              <a:buClr>
-                <a:schemeClr val="dk1"/>
-              </a:buClr>
-              <a:buSzPts val="1000"/>
-              <a:buFont typeface="Malgun Gothic"/>
-              <a:buNone/>
-            </a:pPr>
-            <a:r>
-              <a:rPr lang="ko-KR" b="1"/>
-              <a:t>〉 〉 혼자 공부하는 머신러닝+딥러닝</a:t>
             </a:r>
             <a:endParaRPr/>
           </a:p>
@@ -42345,60 +40725,6 @@
           </a:p>
         </p:txBody>
       </p:sp>
-      <p:sp>
-        <p:nvSpPr>
-          <p:cNvPr id="645" name="Google Shape;645;p42"/>
-          <p:cNvSpPr txBox="1">
-            <a:spLocks noGrp="1"/>
-          </p:cNvSpPr>
-          <p:nvPr>
-            <p:ph type="ftr" idx="11"/>
-          </p:nvPr>
-        </p:nvSpPr>
-        <p:spPr>
-          <a:xfrm>
-            <a:off x="482154" y="6574971"/>
-            <a:ext cx="4114800" cy="216052"/>
-          </a:xfrm>
-          <a:prstGeom prst="rect">
-            <a:avLst/>
-          </a:prstGeom>
-          <a:noFill/>
-          <a:ln>
-            <a:noFill/>
-          </a:ln>
-        </p:spPr>
-        <p:txBody>
-          <a:bodyPr spcFirstLastPara="1" wrap="square" lIns="91425" tIns="45700" rIns="91425" bIns="45700" anchor="ctr" anchorCtr="0">
-            <a:noAutofit/>
-          </a:bodyPr>
-          <a:lstStyle/>
-          <a:p>
-            <a:pPr marL="0" marR="0" lvl="0" indent="0" algn="l" rtl="0">
-              <a:lnSpc>
-                <a:spcPct val="100000"/>
-              </a:lnSpc>
-              <a:spcBef>
-                <a:spcPts val="0"/>
-              </a:spcBef>
-              <a:spcAft>
-                <a:spcPts val="0"/>
-              </a:spcAft>
-              <a:buClr>
-                <a:schemeClr val="dk1"/>
-              </a:buClr>
-              <a:buSzPts val="1000"/>
-              <a:buFont typeface="Malgun Gothic"/>
-              <a:buNone/>
-            </a:pPr>
-            <a:r>
-              <a:rPr lang="ko-KR" b="1"/>
-              <a:t>〉 〉 혼자 공부하는 머신러닝+딥러닝</a:t>
-            </a:r>
-            <a:endParaRPr/>
-          </a:p>
-        </p:txBody>
-      </p:sp>
     </p:spTree>
   </p:cSld>
   <p:clrMapOvr>
@@ -43104,60 +41430,6 @@
           </a:p>
         </p:txBody>
       </p:sp>
-      <p:sp>
-        <p:nvSpPr>
-          <p:cNvPr id="653" name="Google Shape;653;p43"/>
-          <p:cNvSpPr txBox="1">
-            <a:spLocks noGrp="1"/>
-          </p:cNvSpPr>
-          <p:nvPr>
-            <p:ph type="ftr" idx="11"/>
-          </p:nvPr>
-        </p:nvSpPr>
-        <p:spPr>
-          <a:xfrm>
-            <a:off x="482154" y="6574971"/>
-            <a:ext cx="4114800" cy="216052"/>
-          </a:xfrm>
-          <a:prstGeom prst="rect">
-            <a:avLst/>
-          </a:prstGeom>
-          <a:noFill/>
-          <a:ln>
-            <a:noFill/>
-          </a:ln>
-        </p:spPr>
-        <p:txBody>
-          <a:bodyPr spcFirstLastPara="1" wrap="square" lIns="91425" tIns="45700" rIns="91425" bIns="45700" anchor="ctr" anchorCtr="0">
-            <a:noAutofit/>
-          </a:bodyPr>
-          <a:lstStyle/>
-          <a:p>
-            <a:pPr marL="0" marR="0" lvl="0" indent="0" algn="l" rtl="0">
-              <a:lnSpc>
-                <a:spcPct val="100000"/>
-              </a:lnSpc>
-              <a:spcBef>
-                <a:spcPts val="0"/>
-              </a:spcBef>
-              <a:spcAft>
-                <a:spcPts val="0"/>
-              </a:spcAft>
-              <a:buClr>
-                <a:schemeClr val="dk1"/>
-              </a:buClr>
-              <a:buSzPts val="1000"/>
-              <a:buFont typeface="Malgun Gothic"/>
-              <a:buNone/>
-            </a:pPr>
-            <a:r>
-              <a:rPr lang="ko-KR" b="1"/>
-              <a:t>〉 〉 혼자 공부하는 머신러닝+딥러닝</a:t>
-            </a:r>
-            <a:endParaRPr/>
-          </a:p>
-        </p:txBody>
-      </p:sp>
     </p:spTree>
   </p:cSld>
   <p:clrMapOvr>
@@ -43518,60 +41790,6 @@
               <a:t>KNeighborsClassifier</a:t>
             </a:r>
             <a:endParaRPr dirty="0"/>
-          </a:p>
-        </p:txBody>
-      </p:sp>
-      <p:sp>
-        <p:nvSpPr>
-          <p:cNvPr id="661" name="Google Shape;661;g343dd304a0c_0_36"/>
-          <p:cNvSpPr txBox="1">
-            <a:spLocks noGrp="1"/>
-          </p:cNvSpPr>
-          <p:nvPr>
-            <p:ph type="ftr" idx="11"/>
-          </p:nvPr>
-        </p:nvSpPr>
-        <p:spPr>
-          <a:xfrm>
-            <a:off x="482154" y="6574971"/>
-            <a:ext cx="4114800" cy="216000"/>
-          </a:xfrm>
-          <a:prstGeom prst="rect">
-            <a:avLst/>
-          </a:prstGeom>
-          <a:noFill/>
-          <a:ln>
-            <a:noFill/>
-          </a:ln>
-        </p:spPr>
-        <p:txBody>
-          <a:bodyPr spcFirstLastPara="1" wrap="square" lIns="91425" tIns="45700" rIns="91425" bIns="45700" anchor="ctr" anchorCtr="0">
-            <a:noAutofit/>
-          </a:bodyPr>
-          <a:lstStyle/>
-          <a:p>
-            <a:pPr marL="0" marR="0" lvl="0" indent="0" algn="l" rtl="0">
-              <a:lnSpc>
-                <a:spcPct val="100000"/>
-              </a:lnSpc>
-              <a:spcBef>
-                <a:spcPts val="0"/>
-              </a:spcBef>
-              <a:spcAft>
-                <a:spcPts val="0"/>
-              </a:spcAft>
-              <a:buClr>
-                <a:schemeClr val="dk1"/>
-              </a:buClr>
-              <a:buSzPts val="1000"/>
-              <a:buFont typeface="Malgun Gothic"/>
-              <a:buNone/>
-            </a:pPr>
-            <a:r>
-              <a:rPr lang="ko-KR" b="1"/>
-              <a:t>〉 〉 혼자 공부하는 머신러닝+딥러닝</a:t>
-            </a:r>
-            <a:endParaRPr/>
           </a:p>
         </p:txBody>
       </p:sp>
@@ -43897,60 +42115,6 @@
           </a:p>
         </p:txBody>
       </p:sp>
-      <p:sp>
-        <p:nvSpPr>
-          <p:cNvPr id="669" name="Google Shape;669;p44"/>
-          <p:cNvSpPr txBox="1">
-            <a:spLocks noGrp="1"/>
-          </p:cNvSpPr>
-          <p:nvPr>
-            <p:ph type="ftr" idx="11"/>
-          </p:nvPr>
-        </p:nvSpPr>
-        <p:spPr>
-          <a:xfrm>
-            <a:off x="482154" y="6574971"/>
-            <a:ext cx="4114800" cy="216052"/>
-          </a:xfrm>
-          <a:prstGeom prst="rect">
-            <a:avLst/>
-          </a:prstGeom>
-          <a:noFill/>
-          <a:ln>
-            <a:noFill/>
-          </a:ln>
-        </p:spPr>
-        <p:txBody>
-          <a:bodyPr spcFirstLastPara="1" wrap="square" lIns="91425" tIns="45700" rIns="91425" bIns="45700" anchor="ctr" anchorCtr="0">
-            <a:noAutofit/>
-          </a:bodyPr>
-          <a:lstStyle/>
-          <a:p>
-            <a:pPr marL="0" marR="0" lvl="0" indent="0" algn="l" rtl="0">
-              <a:lnSpc>
-                <a:spcPct val="100000"/>
-              </a:lnSpc>
-              <a:spcBef>
-                <a:spcPts val="0"/>
-              </a:spcBef>
-              <a:spcAft>
-                <a:spcPts val="0"/>
-              </a:spcAft>
-              <a:buClr>
-                <a:schemeClr val="dk1"/>
-              </a:buClr>
-              <a:buSzPts val="1000"/>
-              <a:buFont typeface="Malgun Gothic"/>
-              <a:buNone/>
-            </a:pPr>
-            <a:r>
-              <a:rPr lang="ko-KR" b="1"/>
-              <a:t>〉 〉 혼자 공부하는 머신러닝+딥러닝</a:t>
-            </a:r>
-            <a:endParaRPr/>
-          </a:p>
-        </p:txBody>
-      </p:sp>
     </p:spTree>
   </p:cSld>
   <p:clrMapOvr>
@@ -44208,60 +42372,6 @@
               <a:t>( ) 메서드로 다시 계산하기만 하면 됨</a:t>
             </a:r>
             <a:endParaRPr dirty="0"/>
-          </a:p>
-        </p:txBody>
-      </p:sp>
-      <p:sp>
-        <p:nvSpPr>
-          <p:cNvPr id="677" name="Google Shape;677;p45"/>
-          <p:cNvSpPr txBox="1">
-            <a:spLocks noGrp="1"/>
-          </p:cNvSpPr>
-          <p:nvPr>
-            <p:ph type="ftr" idx="11"/>
-          </p:nvPr>
-        </p:nvSpPr>
-        <p:spPr>
-          <a:xfrm>
-            <a:off x="482154" y="6574971"/>
-            <a:ext cx="4114800" cy="216052"/>
-          </a:xfrm>
-          <a:prstGeom prst="rect">
-            <a:avLst/>
-          </a:prstGeom>
-          <a:noFill/>
-          <a:ln>
-            <a:noFill/>
-          </a:ln>
-        </p:spPr>
-        <p:txBody>
-          <a:bodyPr spcFirstLastPara="1" wrap="square" lIns="91425" tIns="45700" rIns="91425" bIns="45700" anchor="ctr" anchorCtr="0">
-            <a:noAutofit/>
-          </a:bodyPr>
-          <a:lstStyle/>
-          <a:p>
-            <a:pPr marL="0" marR="0" lvl="0" indent="0" algn="l" rtl="0">
-              <a:lnSpc>
-                <a:spcPct val="100000"/>
-              </a:lnSpc>
-              <a:spcBef>
-                <a:spcPts val="0"/>
-              </a:spcBef>
-              <a:spcAft>
-                <a:spcPts val="0"/>
-              </a:spcAft>
-              <a:buClr>
-                <a:schemeClr val="dk1"/>
-              </a:buClr>
-              <a:buSzPts val="1000"/>
-              <a:buFont typeface="Malgun Gothic"/>
-              <a:buNone/>
-            </a:pPr>
-            <a:r>
-              <a:rPr lang="ko-KR" b="1"/>
-              <a:t>〉 〉 혼자 공부하는 머신러닝+딥러닝</a:t>
-            </a:r>
-            <a:endParaRPr/>
           </a:p>
         </p:txBody>
       </p:sp>
@@ -44993,60 +43103,6 @@
             <a:r>
               <a:rPr lang="ko-KR"/>
               <a:t>지능을 가진 로봇을 다룬 최초의 소설은 150년 전</a:t>
-            </a:r>
-            <a:endParaRPr/>
-          </a:p>
-        </p:txBody>
-      </p:sp>
-      <p:sp>
-        <p:nvSpPr>
-          <p:cNvPr id="235" name="Google Shape;235;p8"/>
-          <p:cNvSpPr txBox="1">
-            <a:spLocks noGrp="1"/>
-          </p:cNvSpPr>
-          <p:nvPr>
-            <p:ph type="ftr" idx="11"/>
-          </p:nvPr>
-        </p:nvSpPr>
-        <p:spPr>
-          <a:xfrm>
-            <a:off x="482154" y="6574971"/>
-            <a:ext cx="4114800" cy="216052"/>
-          </a:xfrm>
-          <a:prstGeom prst="rect">
-            <a:avLst/>
-          </a:prstGeom>
-          <a:noFill/>
-          <a:ln>
-            <a:noFill/>
-          </a:ln>
-        </p:spPr>
-        <p:txBody>
-          <a:bodyPr spcFirstLastPara="1" wrap="square" lIns="91425" tIns="45700" rIns="91425" bIns="45700" anchor="ctr" anchorCtr="0">
-            <a:noAutofit/>
-          </a:bodyPr>
-          <a:lstStyle/>
-          <a:p>
-            <a:pPr marL="0" marR="0" lvl="0" indent="0" algn="l" rtl="0">
-              <a:lnSpc>
-                <a:spcPct val="100000"/>
-              </a:lnSpc>
-              <a:spcBef>
-                <a:spcPts val="0"/>
-              </a:spcBef>
-              <a:spcAft>
-                <a:spcPts val="0"/>
-              </a:spcAft>
-              <a:buClr>
-                <a:schemeClr val="dk1"/>
-              </a:buClr>
-              <a:buSzPts val="1000"/>
-              <a:buFont typeface="Malgun Gothic"/>
-              <a:buNone/>
-            </a:pPr>
-            <a:r>
-              <a:rPr lang="ko-KR" b="1"/>
-              <a:t>〉 〉 혼자 공부하는 머신러닝+딥러닝</a:t>
             </a:r>
             <a:endParaRPr/>
           </a:p>
@@ -47978,60 +46034,6 @@
           </a:p>
         </p:txBody>
       </p:sp>
-      <p:sp>
-        <p:nvSpPr>
-          <p:cNvPr id="296" name="Google Shape;296;p9"/>
-          <p:cNvSpPr txBox="1">
-            <a:spLocks noGrp="1"/>
-          </p:cNvSpPr>
-          <p:nvPr>
-            <p:ph type="ftr" idx="11"/>
-          </p:nvPr>
-        </p:nvSpPr>
-        <p:spPr>
-          <a:xfrm>
-            <a:off x="482154" y="6574971"/>
-            <a:ext cx="4114800" cy="216052"/>
-          </a:xfrm>
-          <a:prstGeom prst="rect">
-            <a:avLst/>
-          </a:prstGeom>
-          <a:noFill/>
-          <a:ln>
-            <a:noFill/>
-          </a:ln>
-        </p:spPr>
-        <p:txBody>
-          <a:bodyPr spcFirstLastPara="1" wrap="square" lIns="91425" tIns="45700" rIns="91425" bIns="45700" anchor="ctr" anchorCtr="0">
-            <a:noAutofit/>
-          </a:bodyPr>
-          <a:lstStyle/>
-          <a:p>
-            <a:pPr marL="0" marR="0" lvl="0" indent="0" algn="l" rtl="0">
-              <a:lnSpc>
-                <a:spcPct val="100000"/>
-              </a:lnSpc>
-              <a:spcBef>
-                <a:spcPts val="0"/>
-              </a:spcBef>
-              <a:spcAft>
-                <a:spcPts val="0"/>
-              </a:spcAft>
-              <a:buClr>
-                <a:schemeClr val="dk1"/>
-              </a:buClr>
-              <a:buSzPts val="1000"/>
-              <a:buFont typeface="Malgun Gothic"/>
-              <a:buNone/>
-            </a:pPr>
-            <a:r>
-              <a:rPr lang="ko-KR" b="1"/>
-              <a:t>〉 〉 혼자 공부하는 머신러닝+딥러닝</a:t>
-            </a:r>
-            <a:endParaRPr/>
-          </a:p>
-        </p:txBody>
-      </p:sp>
     </p:spTree>
   </p:cSld>
   <p:clrMapOvr>
@@ -48526,60 +46528,6 @@
               <a:cs typeface="Calibri"/>
               <a:sym typeface="Calibri"/>
             </a:endParaRPr>
-          </a:p>
-        </p:txBody>
-      </p:sp>
-      <p:sp>
-        <p:nvSpPr>
-          <p:cNvPr id="304" name="Google Shape;304;p10"/>
-          <p:cNvSpPr txBox="1">
-            <a:spLocks noGrp="1"/>
-          </p:cNvSpPr>
-          <p:nvPr>
-            <p:ph type="ftr" idx="11"/>
-          </p:nvPr>
-        </p:nvSpPr>
-        <p:spPr>
-          <a:xfrm>
-            <a:off x="482154" y="6574971"/>
-            <a:ext cx="4114800" cy="216052"/>
-          </a:xfrm>
-          <a:prstGeom prst="rect">
-            <a:avLst/>
-          </a:prstGeom>
-          <a:noFill/>
-          <a:ln>
-            <a:noFill/>
-          </a:ln>
-        </p:spPr>
-        <p:txBody>
-          <a:bodyPr spcFirstLastPara="1" wrap="square" lIns="91425" tIns="45700" rIns="91425" bIns="45700" anchor="ctr" anchorCtr="0">
-            <a:noAutofit/>
-          </a:bodyPr>
-          <a:lstStyle/>
-          <a:p>
-            <a:pPr marL="0" marR="0" lvl="0" indent="0" algn="l" rtl="0">
-              <a:lnSpc>
-                <a:spcPct val="100000"/>
-              </a:lnSpc>
-              <a:spcBef>
-                <a:spcPts val="0"/>
-              </a:spcBef>
-              <a:spcAft>
-                <a:spcPts val="0"/>
-              </a:spcAft>
-              <a:buClr>
-                <a:schemeClr val="dk1"/>
-              </a:buClr>
-              <a:buSzPts val="1000"/>
-              <a:buFont typeface="Malgun Gothic"/>
-              <a:buNone/>
-            </a:pPr>
-            <a:r>
-              <a:rPr lang="ko-KR" b="1"/>
-              <a:t>〉 〉 혼자 공부하는 머신러닝+딥러닝</a:t>
-            </a:r>
-            <a:endParaRPr/>
           </a:p>
         </p:txBody>
       </p:sp>
@@ -48941,60 +46889,6 @@
           </a:p>
         </p:txBody>
       </p:sp>
-      <p:sp>
-        <p:nvSpPr>
-          <p:cNvPr id="312" name="Google Shape;312;p11"/>
-          <p:cNvSpPr txBox="1">
-            <a:spLocks noGrp="1"/>
-          </p:cNvSpPr>
-          <p:nvPr>
-            <p:ph type="ftr" idx="11"/>
-          </p:nvPr>
-        </p:nvSpPr>
-        <p:spPr>
-          <a:xfrm>
-            <a:off x="482154" y="6574971"/>
-            <a:ext cx="4114800" cy="216052"/>
-          </a:xfrm>
-          <a:prstGeom prst="rect">
-            <a:avLst/>
-          </a:prstGeom>
-          <a:noFill/>
-          <a:ln>
-            <a:noFill/>
-          </a:ln>
-        </p:spPr>
-        <p:txBody>
-          <a:bodyPr spcFirstLastPara="1" wrap="square" lIns="91425" tIns="45700" rIns="91425" bIns="45700" anchor="ctr" anchorCtr="0">
-            <a:noAutofit/>
-          </a:bodyPr>
-          <a:lstStyle/>
-          <a:p>
-            <a:pPr marL="0" marR="0" lvl="0" indent="0" algn="l" rtl="0">
-              <a:lnSpc>
-                <a:spcPct val="100000"/>
-              </a:lnSpc>
-              <a:spcBef>
-                <a:spcPts val="0"/>
-              </a:spcBef>
-              <a:spcAft>
-                <a:spcPts val="0"/>
-              </a:spcAft>
-              <a:buClr>
-                <a:schemeClr val="dk1"/>
-              </a:buClr>
-              <a:buSzPts val="1000"/>
-              <a:buFont typeface="Malgun Gothic"/>
-              <a:buNone/>
-            </a:pPr>
-            <a:r>
-              <a:rPr lang="ko-KR" b="1"/>
-              <a:t>〉 〉 혼자 공부하는 머신러닝+딥러닝</a:t>
-            </a:r>
-            <a:endParaRPr/>
-          </a:p>
-        </p:txBody>
-      </p:sp>
     </p:spTree>
   </p:cSld>
   <p:clrMapOvr>
@@ -49409,60 +47303,6 @@
               <a:cs typeface="Calibri"/>
               <a:sym typeface="Calibri"/>
             </a:endParaRPr>
-          </a:p>
-        </p:txBody>
-      </p:sp>
-      <p:sp>
-        <p:nvSpPr>
-          <p:cNvPr id="320" name="Google Shape;320;p12"/>
-          <p:cNvSpPr txBox="1">
-            <a:spLocks noGrp="1"/>
-          </p:cNvSpPr>
-          <p:nvPr>
-            <p:ph type="ftr" idx="11"/>
-          </p:nvPr>
-        </p:nvSpPr>
-        <p:spPr>
-          <a:xfrm>
-            <a:off x="482154" y="6574971"/>
-            <a:ext cx="4114800" cy="216052"/>
-          </a:xfrm>
-          <a:prstGeom prst="rect">
-            <a:avLst/>
-          </a:prstGeom>
-          <a:noFill/>
-          <a:ln>
-            <a:noFill/>
-          </a:ln>
-        </p:spPr>
-        <p:txBody>
-          <a:bodyPr spcFirstLastPara="1" wrap="square" lIns="91425" tIns="45700" rIns="91425" bIns="45700" anchor="ctr" anchorCtr="0">
-            <a:noAutofit/>
-          </a:bodyPr>
-          <a:lstStyle/>
-          <a:p>
-            <a:pPr marL="0" marR="0" lvl="0" indent="0" algn="l" rtl="0">
-              <a:lnSpc>
-                <a:spcPct val="100000"/>
-              </a:lnSpc>
-              <a:spcBef>
-                <a:spcPts val="0"/>
-              </a:spcBef>
-              <a:spcAft>
-                <a:spcPts val="0"/>
-              </a:spcAft>
-              <a:buClr>
-                <a:schemeClr val="dk1"/>
-              </a:buClr>
-              <a:buSzPts val="1000"/>
-              <a:buFont typeface="Malgun Gothic"/>
-              <a:buNone/>
-            </a:pPr>
-            <a:r>
-              <a:rPr lang="ko-KR" b="1"/>
-              <a:t>〉 〉 혼자 공부하는 머신러닝+딥러닝</a:t>
-            </a:r>
-            <a:endParaRPr/>
           </a:p>
         </p:txBody>
       </p:sp>
